--- a/docs/2026_B_PI_PZPI-22-4_Kozhanov_O_Y/2026_Б_ПІ_ПЗПІ-22-4_Кожанов_О_Ю.pptx
+++ b/docs/2026_B_PI_PZPI-22-4_Kozhanov_O_Y/2026_Б_ПІ_ПЗПІ-22-4_Кожанов_О_Ю.pptx
@@ -3553,7 +3553,7 @@
                 <a:cs typeface="Roboto"/>
                 <a:sym typeface="Roboto"/>
               </a:rPr>
-              <a:t>14 червня 2026</a:t>
+              <a:t>14 липня 2026</a:t>
             </a:r>
           </a:p>
         </p:txBody>
